--- a/slides/decks/s12-survivorship-late-effects.pptx
+++ b/slides/decks/s12-survivorship-late-effects.pptx
@@ -134,19 +134,19 @@
   <p:extLst>
     <p:ext uri="{521415D9-36F7-43E2-AB2F-B90AF26B5E84}">
       <p14:sectionLst xmlns:p14="http://schemas.microsoft.com/office/powerpoint/2010/main">
-        <p14:section name="Opening" id="{2a10aa0a-8c0e-e48e-e858-2b21f74c4f9a}">
+        <p14:section name="Opening" id="{0a1a64a1-e221-02b7-6231-35a7f95d6546}">
           <p14:sldIdLst>
             <p14:sldId id="256"/>
             <p14:sldId id="257"/>
           </p14:sldIdLst>
         </p14:section>
-        <p14:section name="Follow-up framework" id="{a3a65e5b-dc96-a63a-7a60-dc48793b4e10}">
+        <p14:section name="Follow-up framework" id="{d572f743-6ccd-be9d-a40c-3243091fb363}">
           <p14:sldIdLst>
             <p14:sldId id="258"/>
             <p14:sldId id="259"/>
           </p14:sldIdLst>
         </p14:section>
-        <p14:section name="Vaccination" id="{858c73ff-6793-aef1-90a2-1173a385a82f}">
+        <p14:section name="Vaccination" id="{06a4cf22-7e79-7703-cc6c-829b784d7122}">
           <p14:sldIdLst>
             <p14:sldId id="260"/>
             <p14:sldId id="261"/>
@@ -154,14 +154,14 @@
             <p14:sldId id="263"/>
           </p14:sldIdLst>
         </p14:section>
-        <p14:section name="Iron overload" id="{166c9f3f-06b6-b2a2-de27-51f10f2d5988}">
+        <p14:section name="Iron overload" id="{8eb2ff67-3bf3-fe4c-7f46-8d678bf9bf20}">
           <p14:sldIdLst>
             <p14:sldId id="264"/>
             <p14:sldId id="265"/>
             <p14:sldId id="266"/>
           </p14:sldIdLst>
         </p14:section>
-        <p14:section name="Secondary neoplasia" id="{d6fb1f8c-6a54-7c73-9b5f-4f6422ad0db6}">
+        <p14:section name="Secondary neoplasia" id="{39452f90-71f9-533b-8ce9-59249175b0d9}">
           <p14:sldIdLst>
             <p14:sldId id="267"/>
             <p14:sldId id="268"/>
@@ -169,12 +169,12 @@
             <p14:sldId id="270"/>
           </p14:sldIdLst>
         </p14:section>
-        <p14:section name="Cardiometabolic and endocrine" id="{365c4225-7b19-1476-8868-845825f6d7ea}">
+        <p14:section name="Cardiometabolic and endocrine" id="{272d3e0b-d5d4-00f7-d4e8-1a8f7f72acbc}">
           <p14:sldIdLst>
             <p14:sldId id="271"/>
           </p14:sldIdLst>
         </p14:section>
-        <p14:section name="Board questions" id="{e72c66c6-f8be-9044-5ba9-bbec40b212fe}">
+        <p14:section name="Board questions" id="{578c0f42-994b-fd86-3d69-2ebf88e2f689}">
           <p14:sldIdLst>
             <p14:sldId id="272"/>
             <p14:sldId id="273"/>
@@ -184,13 +184,13 @@
             <p14:sldId id="277"/>
           </p14:sldIdLst>
         </p14:section>
-        <p14:section name="References" id="{a5bfbee7-6f4e-4558-2c5c-ddaecb108837}">
+        <p14:section name="References" id="{54ed89ac-e49b-2146-ca30-d408c8453963}">
           <p14:sldIdLst>
             <p14:sldId id="278"/>
             <p14:sldId id="279"/>
           </p14:sldIdLst>
         </p14:section>
-        <p14:section name="Backup" id="{72d3bc9f-98cd-ae08-b075-d6f286070aa5}">
+        <p14:section name="Backup" id="{7672da17-9a96-da7b-eb88-bb39e5741491}">
           <p14:sldIdLst>
             <p14:sldId id="280"/>
             <p14:sldId id="281"/>
@@ -11866,9 +11866,9 @@
             <a:tbl>
               <a:tblPr/>
               <a:tblGrid>
-                <a:gridCol w="2569464"/>
-                <a:gridCol w="4398264"/>
-                <a:gridCol w="3849624"/>
+                <a:gridCol w="2295144"/>
+                <a:gridCol w="5038344"/>
+                <a:gridCol w="3483864"/>
               </a:tblGrid>
               <a:tr h="0">
                 <a:tc>
@@ -12133,7 +12133,7 @@
                             <a:schemeClr val="tx1"/>
                           </a:solidFill>
                         </a:rPr>
-                        <a:t>26.7% with vs 9% without</a:t>
+                        <a:t>26.7% vs 9% without MetS</a:t>
                       </a:r>
                       <a:endParaRPr lang="en-US" sz="1500" dirty="0"/>
                     </a:p>
@@ -12215,10 +12215,36 @@
                             <a:schemeClr val="tx1"/>
                           </a:solidFill>
                         </a:rPr>
-                        <a:t>Prednisone &gt; 0.25 mg/kg/day:</a:t>
+                        <a:t>Prednisone &gt; 0.25 mg/kg/day: RR 3.6; TBI 3.42×</a:t>
                       </a:r>
                       <a:endParaRPr lang="en-US" sz="1500" dirty="0"/>
                     </a:p>
+                  </a:txBody>
+                  <a:tcPr marL="25400" marR="101600" marT="63500" marB="63500" anchor="ctr">
+                    <a:lnL w="0" cap="flat" cmpd="sng" algn="ctr">
+                      <a:noFill/>
+                    </a:lnL>
+                    <a:lnR w="0" cap="flat" cmpd="sng" algn="ctr">
+                      <a:noFill/>
+                    </a:lnR>
+                    <a:lnT w="0" cap="flat" cmpd="sng" algn="ctr">
+                      <a:noFill/>
+                    </a:lnT>
+                    <a:lnB w="6350" cap="flat" cmpd="sng" algn="ctr">
+                      <a:solidFill>
+                        <a:srgbClr val="000000"/>
+                      </a:solidFill>
+                      <a:prstDash val="solid"/>
+                      <a:round/>
+                      <a:headEnd type="none" w="med" len="med"/>
+                      <a:tailEnd type="none" w="med" len="med"/>
+                    </a:lnB>
+                  </a:tcPr>
+                </a:tc>
+                <a:tc>
+                  <a:txBody>
+                    <a:bodyPr/>
+                    <a:lstStyle/>
                     <a:p>
                       <a:pPr indent="0" marL="0">
                         <a:buNone/>
@@ -12229,61 +12255,7 @@
                             <a:schemeClr val="tx1"/>
                           </a:solidFill>
                         </a:rPr>
-                        <a:t>RR 3.6; TBI 3.42× risk</a:t>
-                      </a:r>
-                      <a:endParaRPr lang="en-US" sz="1500" dirty="0"/>
-                    </a:p>
-                  </a:txBody>
-                  <a:tcPr marL="25400" marR="101600" marT="63500" marB="63500" anchor="ctr">
-                    <a:lnL w="0" cap="flat" cmpd="sng" algn="ctr">
-                      <a:noFill/>
-                    </a:lnL>
-                    <a:lnR w="0" cap="flat" cmpd="sng" algn="ctr">
-                      <a:noFill/>
-                    </a:lnR>
-                    <a:lnT w="0" cap="flat" cmpd="sng" algn="ctr">
-                      <a:noFill/>
-                    </a:lnT>
-                    <a:lnB w="6350" cap="flat" cmpd="sng" algn="ctr">
-                      <a:solidFill>
-                        <a:srgbClr val="000000"/>
-                      </a:solidFill>
-                      <a:prstDash val="solid"/>
-                      <a:round/>
-                      <a:headEnd type="none" w="med" len="med"/>
-                      <a:tailEnd type="none" w="med" len="med"/>
-                    </a:lnB>
-                  </a:tcPr>
-                </a:tc>
-                <a:tc>
-                  <a:txBody>
-                    <a:bodyPr/>
-                    <a:lstStyle/>
-                    <a:p>
-                      <a:pPr indent="0" marL="0">
-                        <a:buNone/>
-                      </a:pPr>
-                      <a:r>
-                        <a:rPr lang="en-US" sz="1500" dirty="0">
-                          <a:solidFill>
-                            <a:schemeClr val="tx1"/>
-                          </a:solidFill>
-                        </a:rPr>
-                        <a:t>Screen every 3 years if</a:t>
-                      </a:r>
-                      <a:endParaRPr lang="en-US" sz="1500" dirty="0"/>
-                    </a:p>
-                    <a:p>
-                      <a:pPr indent="0" marL="0">
-                        <a:buNone/>
-                      </a:pPr>
-                      <a:r>
-                        <a:rPr lang="en-US" sz="1500" dirty="0">
-                          <a:solidFill>
-                            <a:schemeClr val="tx1"/>
-                          </a:solidFill>
-                        </a:rPr>
-                        <a:t>≥ 45 y or BP &gt; 135/80</a:t>
+                        <a:t>Every 3 y if ≥ 45 or BP &gt; 135/80</a:t>
                       </a:r>
                       <a:endParaRPr lang="en-US" sz="1500" dirty="0"/>
                     </a:p>
@@ -12365,10 +12337,36 @@
                             <a:schemeClr val="tx1"/>
                           </a:solidFill>
                         </a:rPr>
-                        <a:t>About 1 in 4 after allo-HCT;</a:t>
+                        <a:t>~1 in 4 after allo-HCT; single-dose TBI 5–6× risk</a:t>
                       </a:r>
                       <a:endParaRPr lang="en-US" sz="1500" dirty="0"/>
                     </a:p>
+                  </a:txBody>
+                  <a:tcPr marL="25400" marR="101600" marT="63500" marB="63500" anchor="ctr">
+                    <a:lnL w="0" cap="flat" cmpd="sng" algn="ctr">
+                      <a:noFill/>
+                    </a:lnL>
+                    <a:lnR w="0" cap="flat" cmpd="sng" algn="ctr">
+                      <a:noFill/>
+                    </a:lnR>
+                    <a:lnT w="0" cap="flat" cmpd="sng" algn="ctr">
+                      <a:noFill/>
+                    </a:lnT>
+                    <a:lnB w="6350" cap="flat" cmpd="sng" algn="ctr">
+                      <a:solidFill>
+                        <a:srgbClr val="000000"/>
+                      </a:solidFill>
+                      <a:prstDash val="solid"/>
+                      <a:round/>
+                      <a:headEnd type="none" w="med" len="med"/>
+                      <a:tailEnd type="none" w="med" len="med"/>
+                    </a:lnB>
+                  </a:tcPr>
+                </a:tc>
+                <a:tc>
+                  <a:txBody>
+                    <a:bodyPr/>
+                    <a:lstStyle/>
                     <a:p>
                       <a:pPr indent="0" marL="0">
                         <a:buNone/>
@@ -12379,61 +12377,7 @@
                             <a:schemeClr val="tx1"/>
                           </a:solidFill>
                         </a:rPr>
-                        <a:t>single-dose TBI 5–6× risk</a:t>
-                      </a:r>
-                      <a:endParaRPr lang="en-US" sz="1500" dirty="0"/>
-                    </a:p>
-                  </a:txBody>
-                  <a:tcPr marL="25400" marR="101600" marT="63500" marB="63500" anchor="ctr">
-                    <a:lnL w="0" cap="flat" cmpd="sng" algn="ctr">
-                      <a:noFill/>
-                    </a:lnL>
-                    <a:lnR w="0" cap="flat" cmpd="sng" algn="ctr">
-                      <a:noFill/>
-                    </a:lnR>
-                    <a:lnT w="0" cap="flat" cmpd="sng" algn="ctr">
-                      <a:noFill/>
-                    </a:lnT>
-                    <a:lnB w="6350" cap="flat" cmpd="sng" algn="ctr">
-                      <a:solidFill>
-                        <a:srgbClr val="000000"/>
-                      </a:solidFill>
-                      <a:prstDash val="solid"/>
-                      <a:round/>
-                      <a:headEnd type="none" w="med" len="med"/>
-                      <a:tailEnd type="none" w="med" len="med"/>
-                    </a:lnB>
-                  </a:tcPr>
-                </a:tc>
-                <a:tc>
-                  <a:txBody>
-                    <a:bodyPr/>
-                    <a:lstStyle/>
-                    <a:p>
-                      <a:pPr indent="0" marL="0">
-                        <a:buNone/>
-                      </a:pPr>
-                      <a:r>
-                        <a:rPr lang="en-US" sz="1500" dirty="0">
-                          <a:solidFill>
-                            <a:schemeClr val="tx1"/>
-                          </a:solidFill>
-                        </a:rPr>
-                        <a:t>Yearly TSH, FT4</a:t>
-                      </a:r>
-                      <a:endParaRPr lang="en-US" sz="1500" dirty="0"/>
-                    </a:p>
-                    <a:p>
-                      <a:pPr indent="0" marL="0">
-                        <a:buNone/>
-                      </a:pPr>
-                      <a:r>
-                        <a:rPr lang="en-US" sz="1500" dirty="0">
-                          <a:solidFill>
-                            <a:schemeClr val="tx1"/>
-                          </a:solidFill>
-                        </a:rPr>
-                        <a:t>and palpation</a:t>
+                        <a:t>Yearly TSH, FT4, palpation</a:t>
                       </a:r>
                       <a:endParaRPr lang="en-US" sz="1500" dirty="0"/>
                     </a:p>
@@ -12515,10 +12459,36 @@
                             <a:schemeClr val="tx1"/>
                           </a:solidFill>
                         </a:rPr>
-                        <a:t>Supraphysiological steroids</a:t>
+                        <a:t>Supraphysiological steroids ≥ 1 month, any route</a:t>
                       </a:r>
                       <a:endParaRPr lang="en-US" sz="1500" dirty="0"/>
                     </a:p>
+                  </a:txBody>
+                  <a:tcPr marL="25400" marR="101600" marT="63500" marB="63500" anchor="ctr">
+                    <a:lnL w="0" cap="flat" cmpd="sng" algn="ctr">
+                      <a:noFill/>
+                    </a:lnL>
+                    <a:lnR w="0" cap="flat" cmpd="sng" algn="ctr">
+                      <a:noFill/>
+                    </a:lnR>
+                    <a:lnT w="0" cap="flat" cmpd="sng" algn="ctr">
+                      <a:noFill/>
+                    </a:lnT>
+                    <a:lnB w="6350" cap="flat" cmpd="sng" algn="ctr">
+                      <a:solidFill>
+                        <a:srgbClr val="000000"/>
+                      </a:solidFill>
+                      <a:prstDash val="solid"/>
+                      <a:round/>
+                      <a:headEnd type="none" w="med" len="med"/>
+                      <a:tailEnd type="none" w="med" len="med"/>
+                    </a:lnB>
+                  </a:tcPr>
+                </a:tc>
+                <a:tc>
+                  <a:txBody>
+                    <a:bodyPr/>
+                    <a:lstStyle/>
                     <a:p>
                       <a:pPr indent="0" marL="0">
                         <a:buNone/>
@@ -12529,61 +12499,7 @@
                             <a:schemeClr val="tx1"/>
                           </a:solidFill>
                         </a:rPr>
-                        <a:t>≥ 1 month, any route</a:t>
-                      </a:r>
-                      <a:endParaRPr lang="en-US" sz="1500" dirty="0"/>
-                    </a:p>
-                  </a:txBody>
-                  <a:tcPr marL="25400" marR="101600" marT="63500" marB="63500" anchor="ctr">
-                    <a:lnL w="0" cap="flat" cmpd="sng" algn="ctr">
-                      <a:noFill/>
-                    </a:lnL>
-                    <a:lnR w="0" cap="flat" cmpd="sng" algn="ctr">
-                      <a:noFill/>
-                    </a:lnR>
-                    <a:lnT w="0" cap="flat" cmpd="sng" algn="ctr">
-                      <a:noFill/>
-                    </a:lnT>
-                    <a:lnB w="6350" cap="flat" cmpd="sng" algn="ctr">
-                      <a:solidFill>
-                        <a:srgbClr val="000000"/>
-                      </a:solidFill>
-                      <a:prstDash val="solid"/>
-                      <a:round/>
-                      <a:headEnd type="none" w="med" len="med"/>
-                      <a:tailEnd type="none" w="med" len="med"/>
-                    </a:lnB>
-                  </a:tcPr>
-                </a:tc>
-                <a:tc>
-                  <a:txBody>
-                    <a:bodyPr/>
-                    <a:lstStyle/>
-                    <a:p>
-                      <a:pPr indent="0" marL="0">
-                        <a:buNone/>
-                      </a:pPr>
-                      <a:r>
-                        <a:rPr lang="en-US" sz="1500" dirty="0">
-                          <a:solidFill>
-                            <a:schemeClr val="tx1"/>
-                          </a:solidFill>
-                        </a:rPr>
-                        <a:t>Paired morning cortisol</a:t>
-                      </a:r>
-                      <a:endParaRPr lang="en-US" sz="1500" dirty="0"/>
-                    </a:p>
-                    <a:p>
-                      <a:pPr indent="0" marL="0">
-                        <a:buNone/>
-                      </a:pPr>
-                      <a:r>
-                        <a:rPr lang="en-US" sz="1500" dirty="0">
-                          <a:solidFill>
-                            <a:schemeClr val="tx1"/>
-                          </a:solidFill>
-                        </a:rPr>
-                        <a:t>and ACTH</a:t>
+                        <a:t>Morning cortisol + ACTH</a:t>
                       </a:r>
                       <a:endParaRPr lang="en-US" sz="1500" dirty="0"/>
                     </a:p>
@@ -12719,21 +12635,7 @@
                             <a:schemeClr val="tx1"/>
                           </a:solidFill>
                         </a:rPr>
-                        <a:t>Fertility counselling</a:t>
-                      </a:r>
-                      <a:endParaRPr lang="en-US" sz="1500" dirty="0"/>
-                    </a:p>
-                    <a:p>
-                      <a:pPr indent="0" marL="0">
-                        <a:buNone/>
-                      </a:pPr>
-                      <a:r>
-                        <a:rPr lang="en-US" sz="1500" dirty="0">
-                          <a:solidFill>
-                            <a:schemeClr val="tx1"/>
-                          </a:solidFill>
-                        </a:rPr>
-                        <a:t>before conditioning</a:t>
+                        <a:t>Counsel before conditioning</a:t>
                       </a:r>
                       <a:endParaRPr lang="en-US" sz="1500" dirty="0"/>
                     </a:p>
@@ -12869,21 +12771,7 @@
                             <a:schemeClr val="tx1"/>
                           </a:solidFill>
                         </a:rPr>
-                        <a:t>Monitor testosterone;</a:t>
-                      </a:r>
-                      <a:endParaRPr lang="en-US" sz="1500" dirty="0"/>
-                    </a:p>
-                    <a:p>
-                      <a:pPr indent="0" marL="0">
-                        <a:buNone/>
-                      </a:pPr>
-                      <a:r>
-                        <a:rPr lang="en-US" sz="1500" dirty="0">
-                          <a:solidFill>
-                            <a:schemeClr val="tx1"/>
-                          </a:solidFill>
-                        </a:rPr>
-                        <a:t>sperm cryopreservation</a:t>
+                        <a:t>Testosterone; sperm banking</a:t>
                       </a:r>
                       <a:endParaRPr lang="en-US" sz="1500" dirty="0"/>
                     </a:p>
@@ -12922,7 +12810,7 @@
         </p:nvSpPr>
         <p:spPr>
           <a:xfrm>
-            <a:off x="685800" y="5486400"/>
+            <a:off x="685800" y="5394960"/>
             <a:ext cx="10817352" cy="411480"/>
           </a:xfrm>
           <a:prstGeom prst="rect">
@@ -25722,14 +25610,14 @@
                         <a:buNone/>
                       </a:pPr>
                       <a:r>
-                        <a:rPr lang="en-US" sz="1600" b="1" dirty="0">
+                        <a:rPr lang="en-US" sz="1500" b="1" dirty="0">
                           <a:solidFill>
                             <a:schemeClr val="tx1"/>
                           </a:solidFill>
                         </a:rPr>
                         <a:t>Vaccine</a:t>
                       </a:r>
-                      <a:endParaRPr lang="en-US" sz="1600" dirty="0"/>
+                      <a:endParaRPr lang="en-US" sz="1500" dirty="0"/>
                     </a:p>
                   </a:txBody>
                   <a:tcPr marL="25400" marR="101600" marT="63500" marB="63500" anchor="ctr">
@@ -25768,14 +25656,14 @@
                         <a:buNone/>
                       </a:pPr>
                       <a:r>
-                        <a:rPr lang="en-US" sz="1600" b="1" dirty="0">
+                        <a:rPr lang="en-US" sz="1500" b="1" dirty="0">
                           <a:solidFill>
                             <a:schemeClr val="tx1"/>
                           </a:solidFill>
                         </a:rPr>
                         <a:t>Key fact from Ch. 29</a:t>
                       </a:r>
-                      <a:endParaRPr lang="en-US" sz="1600" dirty="0"/>
+                      <a:endParaRPr lang="en-US" sz="1500" dirty="0"/>
                     </a:p>
                   </a:txBody>
                   <a:tcPr marL="25400" marR="101600" marT="63500" marB="63500" anchor="ctr">
@@ -25816,14 +25704,14 @@
                         <a:buNone/>
                       </a:pPr>
                       <a:r>
-                        <a:rPr lang="en-US" sz="1600" dirty="0">
+                        <a:rPr lang="en-US" sz="1500" dirty="0">
                           <a:solidFill>
                             <a:schemeClr val="tx1"/>
                           </a:solidFill>
                         </a:rPr>
                         <a:t>Pneumococcus</a:t>
                       </a:r>
-                      <a:endParaRPr lang="en-US" sz="1600" dirty="0"/>
+                      <a:endParaRPr lang="en-US" sz="1500" dirty="0"/>
                     </a:p>
                   </a:txBody>
                   <a:tcPr marL="25400" marR="101600" marT="63500" marB="63500" anchor="ctr">
@@ -25856,14 +25744,14 @@
                         <a:buNone/>
                       </a:pPr>
                       <a:r>
-                        <a:rPr lang="en-US" sz="1600" dirty="0">
+                        <a:rPr lang="en-US" sz="1500" dirty="0">
                           <a:solidFill>
                             <a:schemeClr val="tx1"/>
                           </a:solidFill>
                         </a:rPr>
                         <a:t>Invasive disease 50× general population; &lt; 1 in 5 vaccinated</a:t>
                       </a:r>
-                      <a:endParaRPr lang="en-US" sz="1600" dirty="0"/>
+                      <a:endParaRPr lang="en-US" sz="1500" dirty="0"/>
                     </a:p>
                   </a:txBody>
                   <a:tcPr marL="25400" marR="101600" marT="63500" marB="63500" anchor="ctr">
@@ -25898,14 +25786,14 @@
                         <a:buNone/>
                       </a:pPr>
                       <a:r>
-                        <a:rPr lang="en-US" sz="1600" dirty="0">
+                        <a:rPr lang="en-US" sz="1500" dirty="0">
                           <a:solidFill>
                             <a:schemeClr val="tx1"/>
                           </a:solidFill>
                         </a:rPr>
                         <a:t>PCV timing</a:t>
                       </a:r>
-                      <a:endParaRPr lang="en-US" sz="1600" dirty="0"/>
+                      <a:endParaRPr lang="en-US" sz="1500" dirty="0"/>
                     </a:p>
                   </a:txBody>
                   <a:tcPr marL="25400" marR="101600" marT="63500" marB="63500" anchor="ctr">
@@ -25938,14 +25826,14 @@
                         <a:buNone/>
                       </a:pPr>
                       <a:r>
-                        <a:rPr lang="en-US" sz="1600" dirty="0">
+                        <a:rPr lang="en-US" sz="1500" dirty="0">
                           <a:solidFill>
                             <a:schemeClr val="tx1"/>
                           </a:solidFill>
                         </a:rPr>
                         <a:t>Start at 3 m not inferior to 9 m; 54–98% respond; PCV first</a:t>
                       </a:r>
-                      <a:endParaRPr lang="en-US" sz="1600" dirty="0"/>
+                      <a:endParaRPr lang="en-US" sz="1500" dirty="0"/>
                     </a:p>
                   </a:txBody>
                   <a:tcPr marL="25400" marR="101600" marT="63500" marB="63500" anchor="ctr">
@@ -25980,14 +25868,14 @@
                         <a:buNone/>
                       </a:pPr>
                       <a:r>
-                        <a:rPr lang="en-US" sz="1600" dirty="0">
+                        <a:rPr lang="en-US" sz="1500" dirty="0">
                           <a:solidFill>
                             <a:schemeClr val="tx1"/>
                           </a:solidFill>
                         </a:rPr>
                         <a:t>Influenza</a:t>
                       </a:r>
-                      <a:endParaRPr lang="en-US" sz="1600" dirty="0"/>
+                      <a:endParaRPr lang="en-US" sz="1500" dirty="0"/>
                     </a:p>
                   </a:txBody>
                   <a:tcPr marL="25400" marR="101600" marT="63500" marB="63500" anchor="ctr">
@@ -26020,14 +25908,14 @@
                         <a:buNone/>
                       </a:pPr>
                       <a:r>
-                        <a:rPr lang="en-US" sz="1600" dirty="0">
+                        <a:rPr lang="en-US" sz="1500" dirty="0">
                           <a:solidFill>
                             <a:schemeClr val="tx1"/>
                           </a:solidFill>
                         </a:rPr>
                         <a:t>One-third pneumonia, 10% ventilated, 6% die; 20% afebrile</a:t>
                       </a:r>
-                      <a:endParaRPr lang="en-US" sz="1600" dirty="0"/>
+                      <a:endParaRPr lang="en-US" sz="1500" dirty="0"/>
                     </a:p>
                   </a:txBody>
                   <a:tcPr marL="25400" marR="101600" marT="63500" marB="63500" anchor="ctr">
@@ -26062,14 +25950,14 @@
                         <a:buNone/>
                       </a:pPr>
                       <a:r>
-                        <a:rPr lang="en-US" sz="1600" dirty="0">
+                        <a:rPr lang="en-US" sz="1500" dirty="0">
                           <a:solidFill>
                             <a:schemeClr val="tx1"/>
                           </a:solidFill>
                         </a:rPr>
                         <a:t>VZV prophylaxis</a:t>
                       </a:r>
-                      <a:endParaRPr lang="en-US" sz="1600" dirty="0"/>
+                      <a:endParaRPr lang="en-US" sz="1500" dirty="0"/>
                     </a:p>
                   </a:txBody>
                   <a:tcPr marL="25400" marR="101600" marT="63500" marB="63500" anchor="ctr">
@@ -26102,14 +25990,14 @@
                         <a:buNone/>
                       </a:pPr>
                       <a:r>
-                        <a:rPr lang="en-US" sz="1600" dirty="0">
+                        <a:rPr lang="en-US" sz="1500" dirty="0">
                           <a:solidFill>
                             <a:schemeClr val="tx1"/>
                           </a:solidFill>
                         </a:rPr>
                         <a:t>Acyclovir ≥ 1 year after allo-HCT, 3–6 months after auto</a:t>
                       </a:r>
-                      <a:endParaRPr lang="en-US" sz="1600" dirty="0"/>
+                      <a:endParaRPr lang="en-US" sz="1500" dirty="0"/>
                     </a:p>
                   </a:txBody>
                   <a:tcPr marL="25400" marR="101600" marT="63500" marB="63500" anchor="ctr">
@@ -26144,14 +26032,14 @@
                         <a:buNone/>
                       </a:pPr>
                       <a:r>
-                        <a:rPr lang="en-US" sz="1600" dirty="0">
+                        <a:rPr lang="en-US" sz="1500" dirty="0">
                           <a:solidFill>
                             <a:schemeClr val="tx1"/>
                           </a:solidFill>
                         </a:rPr>
                         <a:t>Recombinant zoster, auto-HCT</a:t>
                       </a:r>
-                      <a:endParaRPr lang="en-US" sz="1600" dirty="0"/>
+                      <a:endParaRPr lang="en-US" sz="1500" dirty="0"/>
                     </a:p>
                   </a:txBody>
                   <a:tcPr marL="25400" marR="101600" marT="63500" marB="63500" anchor="ctr">
@@ -26184,14 +26072,14 @@
                         <a:buNone/>
                       </a:pPr>
                       <a:r>
-                        <a:rPr lang="en-US" sz="1600" dirty="0">
+                        <a:rPr lang="en-US" sz="1500" dirty="0">
                           <a:solidFill>
                             <a:schemeClr val="tx1"/>
                           </a:solidFill>
                         </a:rPr>
                         <a:t>RCT: 68.2% efficacy; 2 doses, first at day 50–70</a:t>
                       </a:r>
-                      <a:endParaRPr lang="en-US" sz="1600" dirty="0"/>
+                      <a:endParaRPr lang="en-US" sz="1500" dirty="0"/>
                     </a:p>
                   </a:txBody>
                   <a:tcPr marL="25400" marR="101600" marT="63500" marB="63500" anchor="ctr">
@@ -26226,14 +26114,14 @@
                         <a:buNone/>
                       </a:pPr>
                       <a:r>
-                        <a:rPr lang="en-US" sz="1600" dirty="0">
+                        <a:rPr lang="en-US" sz="1500" dirty="0">
                           <a:solidFill>
                             <a:schemeClr val="tx1"/>
                           </a:solidFill>
                         </a:rPr>
                         <a:t>Recombinant zoster, allo-HCT</a:t>
                       </a:r>
-                      <a:endParaRPr lang="en-US" sz="1600" dirty="0"/>
+                      <a:endParaRPr lang="en-US" sz="1500" dirty="0"/>
                     </a:p>
                   </a:txBody>
                   <a:tcPr marL="25400" marR="101600" marT="63500" marB="63500" anchor="ctr">
@@ -26266,14 +26154,14 @@
                         <a:buNone/>
                       </a:pPr>
                       <a:r>
-                        <a:rPr lang="en-US" sz="1600" dirty="0">
+                        <a:rPr lang="en-US" sz="1500" dirty="0">
                           <a:solidFill>
                             <a:schemeClr val="tx1"/>
                           </a:solidFill>
                         </a:rPr>
                         <a:t>No randomized data; efficacy and safety not established</a:t>
                       </a:r>
-                      <a:endParaRPr lang="en-US" sz="1600" dirty="0"/>
+                      <a:endParaRPr lang="en-US" sz="1500" dirty="0"/>
                     </a:p>
                   </a:txBody>
                   <a:tcPr marL="25400" marR="101600" marT="63500" marB="63500" anchor="ctr">
@@ -26308,14 +26196,14 @@
                         <a:buNone/>
                       </a:pPr>
                       <a:r>
-                        <a:rPr lang="en-US" sz="1600" dirty="0">
+                        <a:rPr lang="en-US" sz="1500" dirty="0">
                           <a:solidFill>
                             <a:schemeClr val="tx1"/>
                           </a:solidFill>
                         </a:rPr>
                         <a:t>Hepatitis B</a:t>
                       </a:r>
-                      <a:endParaRPr lang="en-US" sz="1600" dirty="0"/>
+                      <a:endParaRPr lang="en-US" sz="1500" dirty="0"/>
                     </a:p>
                   </a:txBody>
                   <a:tcPr marL="25400" marR="101600" marT="63500" marB="63500" anchor="ctr">
@@ -26348,14 +26236,14 @@
                         <a:buNone/>
                       </a:pPr>
                       <a:r>
-                        <a:rPr lang="en-US" sz="1600" dirty="0">
+                        <a:rPr lang="en-US" sz="1500" dirty="0">
                           <a:solidFill>
                             <a:schemeClr val="tx1"/>
                           </a:solidFill>
                         </a:rPr>
                         <a:t>40–70% respond; still prevents reverse seroconversion</a:t>
                       </a:r>
-                      <a:endParaRPr lang="en-US" sz="1600" dirty="0"/>
+                      <a:endParaRPr lang="en-US" sz="1500" dirty="0"/>
                     </a:p>
                   </a:txBody>
                   <a:tcPr marL="25400" marR="101600" marT="63500" marB="63500" anchor="ctr">
@@ -26390,14 +26278,14 @@
                         <a:buNone/>
                       </a:pPr>
                       <a:r>
-                        <a:rPr lang="en-US" sz="1600" dirty="0">
+                        <a:rPr lang="en-US" sz="1500" dirty="0">
                           <a:solidFill>
                             <a:schemeClr val="tx1"/>
                           </a:solidFill>
                         </a:rPr>
                         <a:t>HPV</a:t>
                       </a:r>
-                      <a:endParaRPr lang="en-US" sz="1600" dirty="0"/>
+                      <a:endParaRPr lang="en-US" sz="1500" dirty="0"/>
                     </a:p>
                   </a:txBody>
                   <a:tcPr marL="25400" marR="101600" marT="63500" marB="63500" anchor="ctr">
@@ -26430,14 +26318,14 @@
                         <a:buNone/>
                       </a:pPr>
                       <a:r>
-                        <a:rPr lang="en-US" sz="1600" dirty="0">
+                        <a:rPr lang="en-US" sz="1500" dirty="0">
                           <a:solidFill>
                             <a:schemeClr val="tx1"/>
                           </a:solidFill>
                         </a:rPr>
                         <a:t>Genital HPV in about 40% of women long-term; 3 doses</a:t>
                       </a:r>
-                      <a:endParaRPr lang="en-US" sz="1600" dirty="0"/>
+                      <a:endParaRPr lang="en-US" sz="1500" dirty="0"/>
                     </a:p>
                   </a:txBody>
                   <a:tcPr marL="25400" marR="101600" marT="63500" marB="63500" anchor="ctr">

--- a/slides/decks/s12-survivorship-late-effects.pptx
+++ b/slides/decks/s12-survivorship-late-effects.pptx
@@ -134,19 +134,19 @@
   <p:extLst>
     <p:ext uri="{521415D9-36F7-43E2-AB2F-B90AF26B5E84}">
       <p14:sectionLst xmlns:p14="http://schemas.microsoft.com/office/powerpoint/2010/main">
-        <p14:section name="Opening" id="{0a1a64a1-e221-02b7-6231-35a7f95d6546}">
+        <p14:section name="Opening" id="{5a5e91a4-c4ed-16bb-859f-9a856568aade}">
           <p14:sldIdLst>
             <p14:sldId id="256"/>
             <p14:sldId id="257"/>
           </p14:sldIdLst>
         </p14:section>
-        <p14:section name="Follow-up framework" id="{d572f743-6ccd-be9d-a40c-3243091fb363}">
+        <p14:section name="Follow-up framework" id="{2892e587-e971-03b2-debf-bab357dda85d}">
           <p14:sldIdLst>
             <p14:sldId id="258"/>
             <p14:sldId id="259"/>
           </p14:sldIdLst>
         </p14:section>
-        <p14:section name="Vaccination" id="{06a4cf22-7e79-7703-cc6c-829b784d7122}">
+        <p14:section name="Vaccination" id="{e58667ba-f7b7-1349-27a4-b1e4766e5f6d}">
           <p14:sldIdLst>
             <p14:sldId id="260"/>
             <p14:sldId id="261"/>
@@ -154,14 +154,14 @@
             <p14:sldId id="263"/>
           </p14:sldIdLst>
         </p14:section>
-        <p14:section name="Iron overload" id="{8eb2ff67-3bf3-fe4c-7f46-8d678bf9bf20}">
+        <p14:section name="Iron overload" id="{de3f20f9-21ed-73ed-4710-58b1b8528a20}">
           <p14:sldIdLst>
             <p14:sldId id="264"/>
             <p14:sldId id="265"/>
             <p14:sldId id="266"/>
           </p14:sldIdLst>
         </p14:section>
-        <p14:section name="Secondary neoplasia" id="{39452f90-71f9-533b-8ce9-59249175b0d9}">
+        <p14:section name="Secondary neoplasia" id="{606f9da7-dcbb-e2e5-9605-17856c667d25}">
           <p14:sldIdLst>
             <p14:sldId id="267"/>
             <p14:sldId id="268"/>
@@ -169,12 +169,12 @@
             <p14:sldId id="270"/>
           </p14:sldIdLst>
         </p14:section>
-        <p14:section name="Cardiometabolic and endocrine" id="{272d3e0b-d5d4-00f7-d4e8-1a8f7f72acbc}">
+        <p14:section name="Cardiometabolic and endocrine" id="{d55a27fd-cba3-38ea-8c4f-3e6d206a7317}">
           <p14:sldIdLst>
             <p14:sldId id="271"/>
           </p14:sldIdLst>
         </p14:section>
-        <p14:section name="Board questions" id="{578c0f42-994b-fd86-3d69-2ebf88e2f689}">
+        <p14:section name="Board questions" id="{27ec114f-cd9b-4e90-0495-6ab36ff59991}">
           <p14:sldIdLst>
             <p14:sldId id="272"/>
             <p14:sldId id="273"/>
@@ -184,13 +184,13 @@
             <p14:sldId id="277"/>
           </p14:sldIdLst>
         </p14:section>
-        <p14:section name="References" id="{54ed89ac-e49b-2146-ca30-d408c8453963}">
+        <p14:section name="References" id="{e821324c-79d7-3d62-35a9-7f91822ef3ef}">
           <p14:sldIdLst>
             <p14:sldId id="278"/>
             <p14:sldId id="279"/>
           </p14:sldIdLst>
         </p14:section>
-        <p14:section name="Backup" id="{7672da17-9a96-da7b-eb88-bb39e5741491}">
+        <p14:section name="Backup" id="{2d0ef952-a4ee-4d78-34c9-e656959b67e2}">
           <p14:sldIdLst>
             <p14:sldId id="280"/>
             <p14:sldId id="281"/>
@@ -3458,7 +3458,7 @@
             </a:pPr>
             <a:r>
               <a:rPr lang="en-US" dirty="0"/>
-              <a:t>中間是有條件的 live vaccine，MMR、varicella 和 yellow fever。條件要全部符合，移植滿 24 個月、沒有 GVHD、沒有免疫抑制、原發疾病沒有復發，距離上次 IVIG 至少三個月，最好八個月。右邊是永遠不打的，還要加上 rotavirus。Zostavax 的病毒量是 varicella vaccine 的十四倍以上，曾有致死的 vaccine-strain VZV，有些甚至在移植好幾年後才打。</a:t>
+              <a:t>中間是有條件的 live vaccine，MMR、varicella 和 yellow fever。條件要全部符合，移植滿 24 個月、沒有 GVHD、沒有免疫抑制、原發疾病沒有復發，距離上次 IVIG 至少三個月，最好八個月。右邊是永遠不打的，再加上 oral typhoid 和 rotavirus。Zostavax 的病毒量是 varicella vaccine 的十四倍以上，曾有致死的 vaccine-strain VZV，有些甚至在移植好幾年後才打。</a:t>
             </a:r>
           </a:p>
           <a:p>
@@ -23606,7 +23606,7 @@
                   <a:schemeClr val="tx1"/>
                 </a:solidFill>
               </a:rPr>
-              <a:t>OPV, BCG, Zostavax, LAIV, oral typhoid</a:t>
+              <a:t>OPV, BCG, Zostavax, LAIV</a:t>
             </a:r>
             <a:endParaRPr lang="en-US" sz="1600" dirty="0"/>
           </a:p>
@@ -23672,7 +23672,7 @@
                   <a:schemeClr val="tx1"/>
                 </a:solidFill>
               </a:rPr>
-              <a:t>Contraindicated</a:t>
+              <a:t>Also oral typhoid, rotavirus: contraindicated</a:t>
             </a:r>
             <a:endParaRPr lang="en-US" sz="1500" dirty="0"/>
           </a:p>

--- a/slides/decks/s12-survivorship-late-effects.pptx
+++ b/slides/decks/s12-survivorship-late-effects.pptx
@@ -134,19 +134,19 @@
   <p:extLst>
     <p:ext uri="{521415D9-36F7-43E2-AB2F-B90AF26B5E84}">
       <p14:sectionLst xmlns:p14="http://schemas.microsoft.com/office/powerpoint/2010/main">
-        <p14:section name="Opening" id="{5a5e91a4-c4ed-16bb-859f-9a856568aade}">
+        <p14:section name="Opening" id="{085400a7-5ce9-98c3-c5c2-6baba6b921df}">
           <p14:sldIdLst>
             <p14:sldId id="256"/>
             <p14:sldId id="257"/>
           </p14:sldIdLst>
         </p14:section>
-        <p14:section name="Follow-up framework" id="{2892e587-e971-03b2-debf-bab357dda85d}">
+        <p14:section name="Follow-up framework" id="{48636475-5a57-da19-ddf3-37db3cee2322}">
           <p14:sldIdLst>
             <p14:sldId id="258"/>
             <p14:sldId id="259"/>
           </p14:sldIdLst>
         </p14:section>
-        <p14:section name="Vaccination" id="{e58667ba-f7b7-1349-27a4-b1e4766e5f6d}">
+        <p14:section name="Vaccination" id="{ed611389-9082-b0ee-8a93-b0890ef40fcb}">
           <p14:sldIdLst>
             <p14:sldId id="260"/>
             <p14:sldId id="261"/>
@@ -154,14 +154,14 @@
             <p14:sldId id="263"/>
           </p14:sldIdLst>
         </p14:section>
-        <p14:section name="Iron overload" id="{de3f20f9-21ed-73ed-4710-58b1b8528a20}">
+        <p14:section name="Iron overload" id="{86e90c05-b90f-8f8f-222f-1124582d0e56}">
           <p14:sldIdLst>
             <p14:sldId id="264"/>
             <p14:sldId id="265"/>
             <p14:sldId id="266"/>
           </p14:sldIdLst>
         </p14:section>
-        <p14:section name="Secondary neoplasia" id="{606f9da7-dcbb-e2e5-9605-17856c667d25}">
+        <p14:section name="Secondary neoplasia" id="{ebedae57-707c-6fb7-3529-7265a46202e1}">
           <p14:sldIdLst>
             <p14:sldId id="267"/>
             <p14:sldId id="268"/>
@@ -169,12 +169,12 @@
             <p14:sldId id="270"/>
           </p14:sldIdLst>
         </p14:section>
-        <p14:section name="Cardiometabolic and endocrine" id="{d55a27fd-cba3-38ea-8c4f-3e6d206a7317}">
+        <p14:section name="Cardiometabolic and endocrine" id="{652ca33d-ab71-d9c6-f19d-6bf969e187eb}">
           <p14:sldIdLst>
             <p14:sldId id="271"/>
           </p14:sldIdLst>
         </p14:section>
-        <p14:section name="Board questions" id="{27ec114f-cd9b-4e90-0495-6ab36ff59991}">
+        <p14:section name="Board questions" id="{83035cf1-1154-07ae-165d-00d79590101e}">
           <p14:sldIdLst>
             <p14:sldId id="272"/>
             <p14:sldId id="273"/>
@@ -184,13 +184,13 @@
             <p14:sldId id="277"/>
           </p14:sldIdLst>
         </p14:section>
-        <p14:section name="References" id="{e821324c-79d7-3d62-35a9-7f91822ef3ef}">
+        <p14:section name="References" id="{a2834c61-bddf-5f78-0d1a-08d7e4157989}">
           <p14:sldIdLst>
             <p14:sldId id="278"/>
             <p14:sldId id="279"/>
           </p14:sldIdLst>
         </p14:section>
-        <p14:section name="Backup" id="{2d0ef952-a4ee-4d78-34c9-e656959b67e2}">
+        <p14:section name="Backup" id="{7f870b8c-6cad-a79a-66a5-f4eaa7a337ca}">
           <p14:sldIdLst>
             <p14:sldId id="280"/>
             <p14:sldId id="281"/>
@@ -23332,7 +23332,7 @@
                   <a:schemeClr val="tx1"/>
                 </a:solidFill>
               </a:rPr>
-              <a:t>Give on schedule; controlled GVHD no delay</a:t>
+              <a:t>On schedule despite controlled GVHD</a:t>
             </a:r>
             <a:endParaRPr lang="en-US" sz="1500" dirty="0"/>
           </a:p>

--- a/slides/decks/s12-survivorship-late-effects.pptx
+++ b/slides/decks/s12-survivorship-late-effects.pptx
@@ -134,19 +134,19 @@
   <p:extLst>
     <p:ext uri="{521415D9-36F7-43E2-AB2F-B90AF26B5E84}">
       <p14:sectionLst xmlns:p14="http://schemas.microsoft.com/office/powerpoint/2010/main">
-        <p14:section name="Opening" id="{085400a7-5ce9-98c3-c5c2-6baba6b921df}">
+        <p14:section name="Opening" id="{cf75b4b1-a446-8989-159b-250722be7652}">
           <p14:sldIdLst>
             <p14:sldId id="256"/>
             <p14:sldId id="257"/>
           </p14:sldIdLst>
         </p14:section>
-        <p14:section name="Follow-up framework" id="{48636475-5a57-da19-ddf3-37db3cee2322}">
+        <p14:section name="Follow-up framework" id="{39eba5ac-f741-14f4-fd41-88428944a159}">
           <p14:sldIdLst>
             <p14:sldId id="258"/>
             <p14:sldId id="259"/>
           </p14:sldIdLst>
         </p14:section>
-        <p14:section name="Vaccination" id="{ed611389-9082-b0ee-8a93-b0890ef40fcb}">
+        <p14:section name="Vaccination" id="{e6e9ba49-b64c-9a2b-690a-fbc307ec2fce}">
           <p14:sldIdLst>
             <p14:sldId id="260"/>
             <p14:sldId id="261"/>
@@ -154,14 +154,14 @@
             <p14:sldId id="263"/>
           </p14:sldIdLst>
         </p14:section>
-        <p14:section name="Iron overload" id="{86e90c05-b90f-8f8f-222f-1124582d0e56}">
+        <p14:section name="Iron overload" id="{032adcc3-fc72-8b9d-64fc-aa87c00faf52}">
           <p14:sldIdLst>
             <p14:sldId id="264"/>
             <p14:sldId id="265"/>
             <p14:sldId id="266"/>
           </p14:sldIdLst>
         </p14:section>
-        <p14:section name="Secondary neoplasia" id="{ebedae57-707c-6fb7-3529-7265a46202e1}">
+        <p14:section name="Secondary neoplasia" id="{b3a501d2-0f3e-d647-02eb-2f6a61fcd93d}">
           <p14:sldIdLst>
             <p14:sldId id="267"/>
             <p14:sldId id="268"/>
@@ -169,12 +169,12 @@
             <p14:sldId id="270"/>
           </p14:sldIdLst>
         </p14:section>
-        <p14:section name="Cardiometabolic and endocrine" id="{652ca33d-ab71-d9c6-f19d-6bf969e187eb}">
+        <p14:section name="Cardiometabolic and endocrine" id="{dce544a1-c7b9-10ab-aab3-cb3fe86790bb}">
           <p14:sldIdLst>
             <p14:sldId id="271"/>
           </p14:sldIdLst>
         </p14:section>
-        <p14:section name="Board questions" id="{83035cf1-1154-07ae-165d-00d79590101e}">
+        <p14:section name="Board questions" id="{db354bfe-ab28-b1d8-7d8b-16913810d45e}">
           <p14:sldIdLst>
             <p14:sldId id="272"/>
             <p14:sldId id="273"/>
@@ -184,13 +184,13 @@
             <p14:sldId id="277"/>
           </p14:sldIdLst>
         </p14:section>
-        <p14:section name="References" id="{a2834c61-bddf-5f78-0d1a-08d7e4157989}">
+        <p14:section name="References" id="{b4d60435-086f-3241-0068-b986868dc54c}">
           <p14:sldIdLst>
             <p14:sldId id="278"/>
             <p14:sldId id="279"/>
           </p14:sldIdLst>
         </p14:section>
-        <p14:section name="Backup" id="{7f870b8c-6cad-a79a-66a5-f4eaa7a337ca}">
+        <p14:section name="Backup" id="{ea194f41-4503-67b4-1d9d-51068c9c968a}">
           <p14:sldIdLst>
             <p14:sldId id="280"/>
             <p14:sldId id="281"/>
@@ -23332,7 +23332,7 @@
                   <a:schemeClr val="tx1"/>
                 </a:solidFill>
               </a:rPr>
-              <a:t>On schedule despite controlled GVHD</a:t>
+              <a:t>No delay if GVHD is controlled</a:t>
             </a:r>
             <a:endParaRPr lang="en-US" sz="1500" dirty="0"/>
           </a:p>

--- a/slides/decks/s12-survivorship-late-effects.pptx
+++ b/slides/decks/s12-survivorship-late-effects.pptx
@@ -134,19 +134,19 @@
   <p:extLst>
     <p:ext uri="{521415D9-36F7-43E2-AB2F-B90AF26B5E84}">
       <p14:sectionLst xmlns:p14="http://schemas.microsoft.com/office/powerpoint/2010/main">
-        <p14:section name="Opening" id="{cf75b4b1-a446-8989-159b-250722be7652}">
+        <p14:section name="Opening" id="{a265f04e-9034-de81-43ca-b91b2bb656ad}">
           <p14:sldIdLst>
             <p14:sldId id="256"/>
             <p14:sldId id="257"/>
           </p14:sldIdLst>
         </p14:section>
-        <p14:section name="Follow-up framework" id="{39eba5ac-f741-14f4-fd41-88428944a159}">
+        <p14:section name="Follow-up framework" id="{0f7adf69-ff5e-3b62-9e44-0dfc6947ea1d}">
           <p14:sldIdLst>
             <p14:sldId id="258"/>
             <p14:sldId id="259"/>
           </p14:sldIdLst>
         </p14:section>
-        <p14:section name="Vaccination" id="{e6e9ba49-b64c-9a2b-690a-fbc307ec2fce}">
+        <p14:section name="Vaccination" id="{a688f025-b43a-8dd2-93f9-c5f5f721ab58}">
           <p14:sldIdLst>
             <p14:sldId id="260"/>
             <p14:sldId id="261"/>
@@ -154,14 +154,14 @@
             <p14:sldId id="263"/>
           </p14:sldIdLst>
         </p14:section>
-        <p14:section name="Iron overload" id="{032adcc3-fc72-8b9d-64fc-aa87c00faf52}">
+        <p14:section name="Iron overload" id="{df5b79ce-7ee1-884b-ba8f-4fdd3e20f82d}">
           <p14:sldIdLst>
             <p14:sldId id="264"/>
             <p14:sldId id="265"/>
             <p14:sldId id="266"/>
           </p14:sldIdLst>
         </p14:section>
-        <p14:section name="Secondary neoplasia" id="{b3a501d2-0f3e-d647-02eb-2f6a61fcd93d}">
+        <p14:section name="Secondary neoplasia" id="{884614b9-4f99-d4b2-d4d3-1eae9ecd4080}">
           <p14:sldIdLst>
             <p14:sldId id="267"/>
             <p14:sldId id="268"/>
@@ -169,12 +169,12 @@
             <p14:sldId id="270"/>
           </p14:sldIdLst>
         </p14:section>
-        <p14:section name="Cardiometabolic and endocrine" id="{dce544a1-c7b9-10ab-aab3-cb3fe86790bb}">
+        <p14:section name="Cardiometabolic and endocrine" id="{22a9b134-2dbb-e73a-9efb-b9b3369ba805}">
           <p14:sldIdLst>
             <p14:sldId id="271"/>
           </p14:sldIdLst>
         </p14:section>
-        <p14:section name="Board questions" id="{db354bfe-ab28-b1d8-7d8b-16913810d45e}">
+        <p14:section name="Board questions" id="{a1d03dfb-5c88-f7f8-0e64-99c8d3f4c681}">
           <p14:sldIdLst>
             <p14:sldId id="272"/>
             <p14:sldId id="273"/>
@@ -184,13 +184,13 @@
             <p14:sldId id="277"/>
           </p14:sldIdLst>
         </p14:section>
-        <p14:section name="References" id="{b4d60435-086f-3241-0068-b986868dc54c}">
+        <p14:section name="References" id="{06b2c6e7-5a51-36ec-7dd0-f680645db0ee}">
           <p14:sldIdLst>
             <p14:sldId id="278"/>
             <p14:sldId id="279"/>
           </p14:sldIdLst>
         </p14:section>
-        <p14:section name="Backup" id="{ea194f41-4503-67b4-1d9d-51068c9c968a}">
+        <p14:section name="Backup" id="{bc2fea46-d813-bdf9-ca51-dafab91b689d}">
           <p14:sldIdLst>
             <p14:sldId id="280"/>
             <p14:sldId id="281"/>
